--- a/presentation/Predictive_Underwriting_Statement31_Presentation.pptx
+++ b/presentation/Predictive_Underwriting_Statement31_Presentation.pptx
@@ -3193,8 +3193,8 @@
         </p:nvSpPr>
         <p:spPr>
           <a:xfrm>
-            <a:off x="548640" y="475488"/>
-            <a:ext cx="11064240" cy="502920"/>
+            <a:off x="6858000" y="201168"/>
+            <a:ext cx="4785055" cy="320040"/>
           </a:xfrm>
           <a:prstGeom prst="rect">
             <a:avLst/>
@@ -3207,15 +3207,15 @@
           </a:bodyPr>
           <a:lstStyle/>
           <a:p>
-            <a:pPr>
-              <a:defRPr sz="2400" b="1">
-                <a:solidFill>
-                  <a:srgbClr val="F8FAFC"/>
-                </a:solidFill>
-              </a:defRPr>
-            </a:pPr>
-            <a:r>
-              <a:t>Statement #31 — Predictive Underwriting &amp; Loss Forecasting</a:t>
+            <a:pPr algn="r"/>
+            <a:r>
+              <a:rPr sz="1000" b="1">
+                <a:solidFill>
+                  <a:srgbClr val="38BDF8"/>
+                </a:solidFill>
+                <a:hlinkClick r:id="rId2"/>
+              </a:rPr>
+              <a:t>GitHub: https://github.com/Indra-Official/FIntech</a:t>
             </a:r>
           </a:p>
         </p:txBody>
@@ -3228,8 +3228,8 @@
         </p:nvSpPr>
         <p:spPr>
           <a:xfrm>
-            <a:off x="548640" y="960120"/>
-            <a:ext cx="11064240" cy="365760"/>
+            <a:off x="548640" y="475488"/>
+            <a:ext cx="11064240" cy="502920"/>
           </a:xfrm>
           <a:prstGeom prst="rect">
             <a:avLst/>
@@ -3243,6 +3243,41 @@
           <a:lstStyle/>
           <a:p>
             <a:pPr>
+              <a:defRPr sz="2400" b="1">
+                <a:solidFill>
+                  <a:srgbClr val="F8FAFC"/>
+                </a:solidFill>
+              </a:defRPr>
+            </a:pPr>
+            <a:r>
+              <a:t>Statement #31 — Predictive Underwriting &amp; Loss Forecasting</a:t>
+            </a:r>
+          </a:p>
+        </p:txBody>
+      </p:sp>
+      <p:sp>
+        <p:nvSpPr>
+          <p:cNvPr id="6" name="TextBox 5"/>
+          <p:cNvSpPr txBox="1"/>
+          <p:nvPr/>
+        </p:nvSpPr>
+        <p:spPr>
+          <a:xfrm>
+            <a:off x="548640" y="960120"/>
+            <a:ext cx="11064240" cy="365760"/>
+          </a:xfrm>
+          <a:prstGeom prst="rect">
+            <a:avLst/>
+          </a:prstGeom>
+          <a:noFill/>
+        </p:spPr>
+        <p:txBody>
+          <a:bodyPr wrap="none">
+            <a:spAutoFit/>
+          </a:bodyPr>
+          <a:lstStyle/>
+          <a:p>
+            <a:pPr>
               <a:defRPr sz="1200">
                 <a:solidFill>
                   <a:srgbClr val="94A3B8"/>
@@ -3257,7 +3292,7 @@
       </p:sp>
       <p:sp>
         <p:nvSpPr>
-          <p:cNvPr id="6" name="Rounded Rectangle 5"/>
+          <p:cNvPr id="7" name="Rounded Rectangle 6"/>
           <p:cNvSpPr/>
           <p:nvPr/>
         </p:nvSpPr>
@@ -3302,7 +3337,7 @@
       </p:sp>
       <p:sp>
         <p:nvSpPr>
-          <p:cNvPr id="7" name="TextBox 6"/>
+          <p:cNvPr id="8" name="TextBox 7"/>
           <p:cNvSpPr txBox="1"/>
           <p:nvPr/>
         </p:nvSpPr>
@@ -3415,7 +3450,7 @@
       </p:sp>
       <p:sp>
         <p:nvSpPr>
-          <p:cNvPr id="8" name="Rounded Rectangle 7"/>
+          <p:cNvPr id="9" name="Rounded Rectangle 8"/>
           <p:cNvSpPr/>
           <p:nvPr/>
         </p:nvSpPr>
@@ -3460,7 +3495,7 @@
       </p:sp>
       <p:sp>
         <p:nvSpPr>
-          <p:cNvPr id="9" name="TextBox 8"/>
+          <p:cNvPr id="10" name="TextBox 9"/>
           <p:cNvSpPr txBox="1"/>
           <p:nvPr/>
         </p:nvSpPr>
@@ -3581,7 +3616,31 @@
               </a:defRPr>
             </a:pPr>
             <a:r>
-              <a:t>• Live Web Demo: Flask + Interactive Real-Time Telemetry Studio (http://127.0.0.1:5000)</a:t>
+              <a:t>• Live Web Demo: Flask + Real-Time Telemetry Studio (http://127.0.0.1:5000)</a:t>
+            </a:r>
+          </a:p>
+          <a:p>
+            <a:pPr>
+              <a:spcAft>
+                <a:spcPts val="500"/>
+              </a:spcAft>
+            </a:pPr>
+            <a:r>
+              <a:rPr sz="1150">
+                <a:solidFill>
+                  <a:srgbClr val="E2E8F0"/>
+                </a:solidFill>
+              </a:rPr>
+              <a:t>• GitHub Repo: </a:t>
+            </a:r>
+            <a:r>
+              <a:rPr sz="1150" b="1">
+                <a:solidFill>
+                  <a:srgbClr val="38BDF8"/>
+                </a:solidFill>
+                <a:hlinkClick r:id="rId2"/>
+              </a:rPr>
+              <a:t>https://github.com/Indra-Official/FIntech</a:t>
             </a:r>
           </a:p>
         </p:txBody>
@@ -3698,8 +3757,8 @@
         </p:nvSpPr>
         <p:spPr>
           <a:xfrm>
-            <a:off x="548640" y="475488"/>
-            <a:ext cx="11064240" cy="502920"/>
+            <a:off x="6858000" y="201168"/>
+            <a:ext cx="4785055" cy="320040"/>
           </a:xfrm>
           <a:prstGeom prst="rect">
             <a:avLst/>
@@ -3712,15 +3771,15 @@
           </a:bodyPr>
           <a:lstStyle/>
           <a:p>
-            <a:pPr>
-              <a:defRPr sz="2400" b="1">
-                <a:solidFill>
-                  <a:srgbClr val="F8FAFC"/>
-                </a:solidFill>
-              </a:defRPr>
-            </a:pPr>
-            <a:r>
-              <a:t>9. Demonstration Test Cases — Exact Inputs &amp; Outputs</a:t>
+            <a:pPr algn="r"/>
+            <a:r>
+              <a:rPr sz="1000" b="1">
+                <a:solidFill>
+                  <a:srgbClr val="38BDF8"/>
+                </a:solidFill>
+                <a:hlinkClick r:id="rId2"/>
+              </a:rPr>
+              <a:t>GitHub: https://github.com/Indra-Official/FIntech</a:t>
             </a:r>
           </a:p>
         </p:txBody>
@@ -3733,8 +3792,8 @@
         </p:nvSpPr>
         <p:spPr>
           <a:xfrm>
-            <a:off x="548640" y="960120"/>
-            <a:ext cx="11064240" cy="365760"/>
+            <a:off x="548640" y="475488"/>
+            <a:ext cx="11064240" cy="502920"/>
           </a:xfrm>
           <a:prstGeom prst="rect">
             <a:avLst/>
@@ -3748,6 +3807,41 @@
           <a:lstStyle/>
           <a:p>
             <a:pPr>
+              <a:defRPr sz="2400" b="1">
+                <a:solidFill>
+                  <a:srgbClr val="F8FAFC"/>
+                </a:solidFill>
+              </a:defRPr>
+            </a:pPr>
+            <a:r>
+              <a:t>9. Demonstration Test Cases — Exact Inputs &amp; Outputs</a:t>
+            </a:r>
+          </a:p>
+        </p:txBody>
+      </p:sp>
+      <p:sp>
+        <p:nvSpPr>
+          <p:cNvPr id="6" name="TextBox 5"/>
+          <p:cNvSpPr txBox="1"/>
+          <p:nvPr/>
+        </p:nvSpPr>
+        <p:spPr>
+          <a:xfrm>
+            <a:off x="548640" y="960120"/>
+            <a:ext cx="11064240" cy="365760"/>
+          </a:xfrm>
+          <a:prstGeom prst="rect">
+            <a:avLst/>
+          </a:prstGeom>
+          <a:noFill/>
+        </p:spPr>
+        <p:txBody>
+          <a:bodyPr wrap="none">
+            <a:spAutoFit/>
+          </a:bodyPr>
+          <a:lstStyle/>
+          <a:p>
+            <a:pPr>
               <a:defRPr sz="1200">
                 <a:solidFill>
                   <a:srgbClr val="94A3B8"/>
@@ -3762,7 +3856,7 @@
       </p:sp>
       <p:sp>
         <p:nvSpPr>
-          <p:cNvPr id="6" name="Rounded Rectangle 5"/>
+          <p:cNvPr id="7" name="Rounded Rectangle 6"/>
           <p:cNvSpPr/>
           <p:nvPr/>
         </p:nvSpPr>
@@ -3807,7 +3901,7 @@
       </p:sp>
       <p:sp>
         <p:nvSpPr>
-          <p:cNvPr id="7" name="TextBox 6"/>
+          <p:cNvPr id="8" name="TextBox 7"/>
           <p:cNvSpPr txBox="1"/>
           <p:nvPr/>
         </p:nvSpPr>
@@ -3868,7 +3962,7 @@
               </a:defRPr>
             </a:pPr>
             <a:r>
-              <a:t>• Uncalibrated Prob: 13.2%</a:t>
+              <a:t>• Uncalibrated Prob: 12.9%</a:t>
             </a:r>
           </a:p>
           <a:p>
@@ -3898,7 +3992,7 @@
               </a:defRPr>
             </a:pPr>
             <a:r>
-              <a:t>• Telematics Mod: -14.36% Discount</a:t>
+              <a:t>• Telematics Mod: -13.84% Discount</a:t>
             </a:r>
           </a:p>
           <a:p>
@@ -3935,7 +4029,7 @@
       </p:sp>
       <p:sp>
         <p:nvSpPr>
-          <p:cNvPr id="8" name="Rounded Rectangle 7"/>
+          <p:cNvPr id="9" name="Rounded Rectangle 8"/>
           <p:cNvSpPr/>
           <p:nvPr/>
         </p:nvSpPr>
@@ -3980,7 +4074,7 @@
       </p:sp>
       <p:sp>
         <p:nvSpPr>
-          <p:cNvPr id="9" name="TextBox 8"/>
+          <p:cNvPr id="10" name="TextBox 9"/>
           <p:cNvSpPr txBox="1"/>
           <p:nvPr/>
         </p:nvSpPr>
@@ -4041,7 +4135,7 @@
               </a:defRPr>
             </a:pPr>
             <a:r>
-              <a:t>• Uncalibrated Prob: 35.3%</a:t>
+              <a:t>• Uncalibrated Prob: 35.0%</a:t>
             </a:r>
           </a:p>
           <a:p>
@@ -4086,7 +4180,7 @@
               </a:defRPr>
             </a:pPr>
             <a:r>
-              <a:t>• Annual Premium: $671.99</a:t>
+              <a:t>• Annual Premium: $673.51</a:t>
             </a:r>
           </a:p>
           <a:p>
@@ -4108,7 +4202,7 @@
       </p:sp>
       <p:sp>
         <p:nvSpPr>
-          <p:cNvPr id="10" name="Rounded Rectangle 9"/>
+          <p:cNvPr id="11" name="Rounded Rectangle 10"/>
           <p:cNvSpPr/>
           <p:nvPr/>
         </p:nvSpPr>
@@ -4153,7 +4247,7 @@
       </p:sp>
       <p:sp>
         <p:nvSpPr>
-          <p:cNvPr id="11" name="TextBox 10"/>
+          <p:cNvPr id="12" name="TextBox 11"/>
           <p:cNvSpPr txBox="1"/>
           <p:nvPr/>
         </p:nvSpPr>
@@ -4229,37 +4323,37 @@
               </a:defRPr>
             </a:pPr>
             <a:r>
-              <a:t>• Final Risk Prob: 84.6%</a:t>
-            </a:r>
-          </a:p>
-          <a:p>
-            <a:pPr>
-              <a:spcAft>
-                <a:spcPts val="500"/>
-              </a:spcAft>
-              <a:defRPr sz="1150">
-                <a:solidFill>
-                  <a:srgbClr val="E2E8F0"/>
-                </a:solidFill>
-              </a:defRPr>
-            </a:pPr>
-            <a:r>
-              <a:t>• Telematics Mod: +13.39% Surcharge</a:t>
-            </a:r>
-          </a:p>
-          <a:p>
-            <a:pPr>
-              <a:spcAft>
-                <a:spcPts val="500"/>
-              </a:spcAft>
-              <a:defRPr sz="1150">
-                <a:solidFill>
-                  <a:srgbClr val="E2E8F0"/>
-                </a:solidFill>
-              </a:defRPr>
-            </a:pPr>
-            <a:r>
-              <a:t>• Annual Premium: $8,476.40</a:t>
+              <a:t>• Final Risk Prob: 89.2%</a:t>
+            </a:r>
+          </a:p>
+          <a:p>
+            <a:pPr>
+              <a:spcAft>
+                <a:spcPts val="500"/>
+              </a:spcAft>
+              <a:defRPr sz="1150">
+                <a:solidFill>
+                  <a:srgbClr val="E2E8F0"/>
+                </a:solidFill>
+              </a:defRPr>
+            </a:pPr>
+            <a:r>
+              <a:t>• Telematics Mod: +15.28% Surcharge</a:t>
+            </a:r>
+          </a:p>
+          <a:p>
+            <a:pPr>
+              <a:spcAft>
+                <a:spcPts val="500"/>
+              </a:spcAft>
+              <a:defRPr sz="1150">
+                <a:solidFill>
+                  <a:srgbClr val="E2E8F0"/>
+                </a:solidFill>
+              </a:defRPr>
+            </a:pPr>
+            <a:r>
+              <a:t>• Annual Premium: $9,074.95</a:t>
             </a:r>
           </a:p>
           <a:p>
@@ -4281,7 +4375,7 @@
       </p:sp>
       <p:sp>
         <p:nvSpPr>
-          <p:cNvPr id="12" name="Rounded Rectangle 11"/>
+          <p:cNvPr id="13" name="Rounded Rectangle 12"/>
           <p:cNvSpPr/>
           <p:nvPr/>
         </p:nvSpPr>
@@ -4326,7 +4420,7 @@
       </p:sp>
       <p:sp>
         <p:nvSpPr>
-          <p:cNvPr id="13" name="TextBox 12"/>
+          <p:cNvPr id="14" name="TextBox 13"/>
           <p:cNvSpPr txBox="1"/>
           <p:nvPr/>
         </p:nvSpPr>
@@ -4432,7 +4526,7 @@
               </a:defRPr>
             </a:pPr>
             <a:r>
-              <a:t>• Annual Quote: $8,350.29</a:t>
+              <a:t>• Annual Quote: $8,380.24</a:t>
             </a:r>
           </a:p>
           <a:p>
@@ -4564,8 +4658,8 @@
         </p:nvSpPr>
         <p:spPr>
           <a:xfrm>
-            <a:off x="548640" y="475488"/>
-            <a:ext cx="11064240" cy="502920"/>
+            <a:off x="6858000" y="201168"/>
+            <a:ext cx="4785055" cy="320040"/>
           </a:xfrm>
           <a:prstGeom prst="rect">
             <a:avLst/>
@@ -4578,15 +4672,15 @@
           </a:bodyPr>
           <a:lstStyle/>
           <a:p>
-            <a:pPr>
-              <a:defRPr sz="2400" b="1">
-                <a:solidFill>
-                  <a:srgbClr val="F8FAFC"/>
-                </a:solidFill>
-              </a:defRPr>
-            </a:pPr>
-            <a:r>
-              <a:t>10. GitHub Repository Structure &amp; Reproducibility Guide</a:t>
+            <a:pPr algn="r"/>
+            <a:r>
+              <a:rPr sz="1000" b="1">
+                <a:solidFill>
+                  <a:srgbClr val="38BDF8"/>
+                </a:solidFill>
+                <a:hlinkClick r:id="rId2"/>
+              </a:rPr>
+              <a:t>GitHub: https://github.com/Indra-Official/FIntech</a:t>
             </a:r>
           </a:p>
         </p:txBody>
@@ -4599,8 +4693,8 @@
         </p:nvSpPr>
         <p:spPr>
           <a:xfrm>
-            <a:off x="548640" y="960120"/>
-            <a:ext cx="11064240" cy="365760"/>
+            <a:off x="548640" y="475488"/>
+            <a:ext cx="11064240" cy="502920"/>
           </a:xfrm>
           <a:prstGeom prst="rect">
             <a:avLst/>
@@ -4614,6 +4708,41 @@
           <a:lstStyle/>
           <a:p>
             <a:pPr>
+              <a:defRPr sz="2400" b="1">
+                <a:solidFill>
+                  <a:srgbClr val="F8FAFC"/>
+                </a:solidFill>
+              </a:defRPr>
+            </a:pPr>
+            <a:r>
+              <a:t>10. GitHub Repository Structure &amp; Reproducibility Guide</a:t>
+            </a:r>
+          </a:p>
+        </p:txBody>
+      </p:sp>
+      <p:sp>
+        <p:nvSpPr>
+          <p:cNvPr id="6" name="TextBox 5"/>
+          <p:cNvSpPr txBox="1"/>
+          <p:nvPr/>
+        </p:nvSpPr>
+        <p:spPr>
+          <a:xfrm>
+            <a:off x="548640" y="960120"/>
+            <a:ext cx="11064240" cy="365760"/>
+          </a:xfrm>
+          <a:prstGeom prst="rect">
+            <a:avLst/>
+          </a:prstGeom>
+          <a:noFill/>
+        </p:spPr>
+        <p:txBody>
+          <a:bodyPr wrap="none">
+            <a:spAutoFit/>
+          </a:bodyPr>
+          <a:lstStyle/>
+          <a:p>
+            <a:pPr>
               <a:defRPr sz="1200">
                 <a:solidFill>
                   <a:srgbClr val="94A3B8"/>
@@ -4628,7 +4757,7 @@
       </p:sp>
       <p:sp>
         <p:nvSpPr>
-          <p:cNvPr id="6" name="Rounded Rectangle 5"/>
+          <p:cNvPr id="7" name="Rounded Rectangle 6"/>
           <p:cNvSpPr/>
           <p:nvPr/>
         </p:nvSpPr>
@@ -4673,7 +4802,7 @@
       </p:sp>
       <p:sp>
         <p:nvSpPr>
-          <p:cNvPr id="7" name="TextBox 6"/>
+          <p:cNvPr id="8" name="TextBox 7"/>
           <p:cNvSpPr txBox="1"/>
           <p:nvPr/>
         </p:nvSpPr>
@@ -4876,7 +5005,7 @@
       </p:sp>
       <p:sp>
         <p:nvSpPr>
-          <p:cNvPr id="8" name="Rounded Rectangle 7"/>
+          <p:cNvPr id="9" name="Rounded Rectangle 8"/>
           <p:cNvSpPr/>
           <p:nvPr/>
         </p:nvSpPr>
@@ -4921,7 +5050,7 @@
       </p:sp>
       <p:sp>
         <p:nvSpPr>
-          <p:cNvPr id="9" name="TextBox 8"/>
+          <p:cNvPr id="10" name="TextBox 9"/>
           <p:cNvSpPr txBox="1"/>
           <p:nvPr/>
         </p:nvSpPr>
@@ -4952,142 +5081,154 @@
               </a:defRPr>
             </a:pPr>
             <a:r>
-              <a:t>Quick-Start &amp; GitHub Upload Commands</a:t>
-            </a:r>
-          </a:p>
-          <a:p>
-            <a:pPr>
-              <a:spcAft>
-                <a:spcPts val="500"/>
-              </a:spcAft>
-              <a:defRPr sz="1150">
-                <a:solidFill>
-                  <a:srgbClr val="E2E8F0"/>
-                </a:solidFill>
-              </a:defRPr>
-            </a:pPr>
-            <a:r>
-              <a:t>• 1. Install Dependencies:  pip install -r requirements.txt</a:t>
-            </a:r>
-          </a:p>
-          <a:p>
-            <a:pPr>
-              <a:spcAft>
-                <a:spcPts val="500"/>
-              </a:spcAft>
-              <a:defRPr sz="1150">
-                <a:solidFill>
-                  <a:srgbClr val="E2E8F0"/>
-                </a:solidFill>
-              </a:defRPr>
-            </a:pPr>
-            <a:r>
-              <a:t>• 2. Regenerate Benchmarks &amp; Slides:  python generate_assets_and_ppt.py</a:t>
-            </a:r>
-          </a:p>
-          <a:p>
-            <a:pPr>
-              <a:spcAft>
-                <a:spcPts val="500"/>
-              </a:spcAft>
-              <a:defRPr sz="1150">
-                <a:solidFill>
-                  <a:srgbClr val="E2E8F0"/>
-                </a:solidFill>
-              </a:defRPr>
-            </a:pPr>
-            <a:r>
-              <a:t>• 3. Launch Interactive Live Demo:  python app.py  (http://127.0.0.1:5000)</a:t>
-            </a:r>
-          </a:p>
-          <a:p>
-            <a:pPr>
-              <a:spcAft>
-                <a:spcPts val="500"/>
-              </a:spcAft>
-              <a:defRPr sz="1150">
-                <a:solidFill>
-                  <a:srgbClr val="E2E8F0"/>
-                </a:solidFill>
-              </a:defRPr>
-            </a:pPr>
-            <a:r>
-              <a:t>• 4. Push to GitHub Repository:</a:t>
-            </a:r>
-          </a:p>
-          <a:p>
-            <a:pPr>
-              <a:spcAft>
-                <a:spcPts val="500"/>
-              </a:spcAft>
-              <a:defRPr sz="1150">
-                <a:solidFill>
-                  <a:srgbClr val="E2E8F0"/>
-                </a:solidFill>
-              </a:defRPr>
-            </a:pPr>
-            <a:r>
-              <a:t>•    git init &amp;&amp; git add .</a:t>
-            </a:r>
-          </a:p>
-          <a:p>
-            <a:pPr>
-              <a:spcAft>
-                <a:spcPts val="500"/>
-              </a:spcAft>
-              <a:defRPr sz="1150">
-                <a:solidFill>
-                  <a:srgbClr val="E2E8F0"/>
-                </a:solidFill>
-              </a:defRPr>
-            </a:pPr>
-            <a:r>
-              <a:t>•    git commit -m 'Feat: Statement #31 Predictive Underwriting (2026 Update)'</a:t>
-            </a:r>
-          </a:p>
-          <a:p>
-            <a:pPr>
-              <a:spcAft>
-                <a:spcPts val="500"/>
-              </a:spcAft>
-              <a:defRPr sz="1150">
-                <a:solidFill>
-                  <a:srgbClr val="E2E8F0"/>
-                </a:solidFill>
-              </a:defRPr>
-            </a:pPr>
-            <a:r>
-              <a:t>•    git branch -M main</a:t>
-            </a:r>
-          </a:p>
-          <a:p>
-            <a:pPr>
-              <a:spcAft>
-                <a:spcPts val="500"/>
-              </a:spcAft>
-              <a:defRPr sz="1150">
-                <a:solidFill>
-                  <a:srgbClr val="E2E8F0"/>
-                </a:solidFill>
-              </a:defRPr>
-            </a:pPr>
-            <a:r>
-              <a:t>•    git remote add origin https://github.com/&lt;username&gt;/&lt;repo&gt;.git</a:t>
-            </a:r>
-          </a:p>
-          <a:p>
-            <a:pPr>
-              <a:spcAft>
-                <a:spcPts val="500"/>
-              </a:spcAft>
-              <a:defRPr sz="1150">
-                <a:solidFill>
-                  <a:srgbClr val="E2E8F0"/>
-                </a:solidFill>
-              </a:defRPr>
-            </a:pPr>
-            <a:r>
-              <a:t>•    git push -u origin main</a:t>
+              <a:t>Quick-Start &amp; GitHub Repository Link</a:t>
+            </a:r>
+          </a:p>
+          <a:p>
+            <a:pPr>
+              <a:spcAft>
+                <a:spcPts val="500"/>
+              </a:spcAft>
+            </a:pPr>
+            <a:r>
+              <a:rPr sz="1150">
+                <a:solidFill>
+                  <a:srgbClr val="E2E8F0"/>
+                </a:solidFill>
+              </a:rPr>
+              <a:t>• Official GitHub Repository: </a:t>
+            </a:r>
+            <a:r>
+              <a:rPr sz="1150" b="1">
+                <a:solidFill>
+                  <a:srgbClr val="38BDF8"/>
+                </a:solidFill>
+                <a:hlinkClick r:id="rId2"/>
+              </a:rPr>
+              <a:t>https://github.com/Indra-Official/FIntech</a:t>
+            </a:r>
+          </a:p>
+          <a:p>
+            <a:pPr>
+              <a:spcAft>
+                <a:spcPts val="500"/>
+              </a:spcAft>
+            </a:pPr>
+            <a:r>
+              <a:rPr sz="1150">
+                <a:solidFill>
+                  <a:srgbClr val="E2E8F0"/>
+                </a:solidFill>
+              </a:rPr>
+              <a:t>• 1. Clone Repository:  git clone </a:t>
+            </a:r>
+            <a:r>
+              <a:rPr sz="1150" b="1">
+                <a:solidFill>
+                  <a:srgbClr val="38BDF8"/>
+                </a:solidFill>
+                <a:hlinkClick r:id="rId2"/>
+              </a:rPr>
+              <a:t>https://github.com/Indra-Official/FIntech.git</a:t>
+            </a:r>
+          </a:p>
+          <a:p>
+            <a:pPr>
+              <a:spcAft>
+                <a:spcPts val="500"/>
+              </a:spcAft>
+              <a:defRPr sz="1150">
+                <a:solidFill>
+                  <a:srgbClr val="E2E8F0"/>
+                </a:solidFill>
+              </a:defRPr>
+            </a:pPr>
+            <a:r>
+              <a:t>• 2. Install Dependencies:  pip install -r requirements.txt</a:t>
+            </a:r>
+          </a:p>
+          <a:p>
+            <a:pPr>
+              <a:spcAft>
+                <a:spcPts val="500"/>
+              </a:spcAft>
+              <a:defRPr sz="1150">
+                <a:solidFill>
+                  <a:srgbClr val="E2E8F0"/>
+                </a:solidFill>
+              </a:defRPr>
+            </a:pPr>
+            <a:r>
+              <a:t>• 3. Regenerate Benchmarks &amp; Slides:  python generate_assets_and_ppt.py</a:t>
+            </a:r>
+          </a:p>
+          <a:p>
+            <a:pPr>
+              <a:spcAft>
+                <a:spcPts val="500"/>
+              </a:spcAft>
+              <a:defRPr sz="1150">
+                <a:solidFill>
+                  <a:srgbClr val="E2E8F0"/>
+                </a:solidFill>
+              </a:defRPr>
+            </a:pPr>
+            <a:r>
+              <a:t>• 4. Launch Interactive Live Demo:  python app.py  (http://127.0.0.1:5000)</a:t>
+            </a:r>
+          </a:p>
+          <a:p>
+            <a:pPr>
+              <a:spcAft>
+                <a:spcPts val="500"/>
+              </a:spcAft>
+              <a:defRPr sz="1150">
+                <a:solidFill>
+                  <a:srgbClr val="E2E8F0"/>
+                </a:solidFill>
+              </a:defRPr>
+            </a:pPr>
+            <a:r>
+              <a:t>• 5. Git Remote Configuration:</a:t>
+            </a:r>
+          </a:p>
+          <a:p>
+            <a:pPr>
+              <a:spcAft>
+                <a:spcPts val="500"/>
+              </a:spcAft>
+            </a:pPr>
+            <a:r>
+              <a:rPr sz="1150">
+                <a:solidFill>
+                  <a:srgbClr val="E2E8F0"/>
+                </a:solidFill>
+              </a:rPr>
+              <a:t>•    git remote add origin </a:t>
+            </a:r>
+            <a:r>
+              <a:rPr sz="1150" b="1">
+                <a:solidFill>
+                  <a:srgbClr val="38BDF8"/>
+                </a:solidFill>
+                <a:hlinkClick r:id="rId2"/>
+              </a:rPr>
+              <a:t>https://github.com/Indra-Official/FIntech.git</a:t>
+            </a:r>
+          </a:p>
+          <a:p>
+            <a:pPr>
+              <a:spcAft>
+                <a:spcPts val="500"/>
+              </a:spcAft>
+              <a:defRPr sz="1150">
+                <a:solidFill>
+                  <a:srgbClr val="E2E8F0"/>
+                </a:solidFill>
+              </a:defRPr>
+            </a:pPr>
+            <a:r>
+              <a:t>•    git branch -M main &amp;&amp; git push -u origin main</a:t>
             </a:r>
           </a:p>
         </p:txBody>
@@ -5204,8 +5345,8 @@
         </p:nvSpPr>
         <p:spPr>
           <a:xfrm>
-            <a:off x="548640" y="475488"/>
-            <a:ext cx="11064240" cy="502920"/>
+            <a:off x="6858000" y="201168"/>
+            <a:ext cx="4785055" cy="320040"/>
           </a:xfrm>
           <a:prstGeom prst="rect">
             <a:avLst/>
@@ -5218,15 +5359,15 @@
           </a:bodyPr>
           <a:lstStyle/>
           <a:p>
-            <a:pPr>
-              <a:defRPr sz="2400" b="1">
-                <a:solidFill>
-                  <a:srgbClr val="F8FAFC"/>
-                </a:solidFill>
-              </a:defRPr>
-            </a:pPr>
-            <a:r>
-              <a:t>11. Conclusion &amp; Business Impact Summary</a:t>
+            <a:pPr algn="r"/>
+            <a:r>
+              <a:rPr sz="1000" b="1">
+                <a:solidFill>
+                  <a:srgbClr val="38BDF8"/>
+                </a:solidFill>
+                <a:hlinkClick r:id="rId2"/>
+              </a:rPr>
+              <a:t>GitHub: https://github.com/Indra-Official/FIntech</a:t>
             </a:r>
           </a:p>
         </p:txBody>
@@ -5239,8 +5380,8 @@
         </p:nvSpPr>
         <p:spPr>
           <a:xfrm>
-            <a:off x="548640" y="960120"/>
-            <a:ext cx="11064240" cy="365760"/>
+            <a:off x="548640" y="475488"/>
+            <a:ext cx="11064240" cy="502920"/>
           </a:xfrm>
           <a:prstGeom prst="rect">
             <a:avLst/>
@@ -5254,6 +5395,41 @@
           <a:lstStyle/>
           <a:p>
             <a:pPr>
+              <a:defRPr sz="2400" b="1">
+                <a:solidFill>
+                  <a:srgbClr val="F8FAFC"/>
+                </a:solidFill>
+              </a:defRPr>
+            </a:pPr>
+            <a:r>
+              <a:t>11. Conclusion &amp; Business Impact Summary</a:t>
+            </a:r>
+          </a:p>
+        </p:txBody>
+      </p:sp>
+      <p:sp>
+        <p:nvSpPr>
+          <p:cNvPr id="6" name="TextBox 5"/>
+          <p:cNvSpPr txBox="1"/>
+          <p:nvPr/>
+        </p:nvSpPr>
+        <p:spPr>
+          <a:xfrm>
+            <a:off x="548640" y="960120"/>
+            <a:ext cx="11064240" cy="365760"/>
+          </a:xfrm>
+          <a:prstGeom prst="rect">
+            <a:avLst/>
+          </a:prstGeom>
+          <a:noFill/>
+        </p:spPr>
+        <p:txBody>
+          <a:bodyPr wrap="none">
+            <a:spAutoFit/>
+          </a:bodyPr>
+          <a:lstStyle/>
+          <a:p>
+            <a:pPr>
               <a:defRPr sz="1200">
                 <a:solidFill>
                   <a:srgbClr val="94A3B8"/>
@@ -5268,7 +5444,7 @@
       </p:sp>
       <p:sp>
         <p:nvSpPr>
-          <p:cNvPr id="6" name="Rounded Rectangle 5"/>
+          <p:cNvPr id="7" name="Rounded Rectangle 6"/>
           <p:cNvSpPr/>
           <p:nvPr/>
         </p:nvSpPr>
@@ -5313,7 +5489,7 @@
       </p:sp>
       <p:sp>
         <p:nvSpPr>
-          <p:cNvPr id="7" name="TextBox 6"/>
+          <p:cNvPr id="8" name="TextBox 7"/>
           <p:cNvSpPr txBox="1"/>
           <p:nvPr/>
         </p:nvSpPr>
@@ -5420,6 +5596,30 @@
             </a:pPr>
             <a:r>
               <a:t>• 5. Proactive Drift Governance: Automated PSI and KS-test monitoring across quarterly streams detects severe weather/behavioral shifts and triggers recalibration.</a:t>
+            </a:r>
+          </a:p>
+          <a:p>
+            <a:pPr>
+              <a:spcAft>
+                <a:spcPts val="500"/>
+              </a:spcAft>
+            </a:pPr>
+            <a:r>
+              <a:rPr sz="1150">
+                <a:solidFill>
+                  <a:srgbClr val="E2E8F0"/>
+                </a:solidFill>
+              </a:rPr>
+              <a:t>• 6. Full Source Code &amp; Interactive Demo: </a:t>
+            </a:r>
+            <a:r>
+              <a:rPr sz="1150" b="1">
+                <a:solidFill>
+                  <a:srgbClr val="38BDF8"/>
+                </a:solidFill>
+                <a:hlinkClick r:id="rId2"/>
+              </a:rPr>
+              <a:t>https://github.com/Indra-Official/FIntech</a:t>
             </a:r>
           </a:p>
         </p:txBody>
@@ -5536,8 +5736,8 @@
         </p:nvSpPr>
         <p:spPr>
           <a:xfrm>
-            <a:off x="548640" y="475488"/>
-            <a:ext cx="11064240" cy="502920"/>
+            <a:off x="6858000" y="201168"/>
+            <a:ext cx="4785055" cy="320040"/>
           </a:xfrm>
           <a:prstGeom prst="rect">
             <a:avLst/>
@@ -5550,15 +5750,15 @@
           </a:bodyPr>
           <a:lstStyle/>
           <a:p>
-            <a:pPr>
-              <a:defRPr sz="2400" b="1">
-                <a:solidFill>
-                  <a:srgbClr val="F8FAFC"/>
-                </a:solidFill>
-              </a:defRPr>
-            </a:pPr>
-            <a:r>
-              <a:t>1. Problem Statement &amp; Limitations of Legacy Underwriting</a:t>
+            <a:pPr algn="r"/>
+            <a:r>
+              <a:rPr sz="1000" b="1">
+                <a:solidFill>
+                  <a:srgbClr val="38BDF8"/>
+                </a:solidFill>
+                <a:hlinkClick r:id="rId2"/>
+              </a:rPr>
+              <a:t>GitHub: https://github.com/Indra-Official/FIntech</a:t>
             </a:r>
           </a:p>
         </p:txBody>
@@ -5571,8 +5771,8 @@
         </p:nvSpPr>
         <p:spPr>
           <a:xfrm>
-            <a:off x="548640" y="960120"/>
-            <a:ext cx="11064240" cy="365760"/>
+            <a:off x="548640" y="475488"/>
+            <a:ext cx="11064240" cy="502920"/>
           </a:xfrm>
           <a:prstGeom prst="rect">
             <a:avLst/>
@@ -5586,6 +5786,41 @@
           <a:lstStyle/>
           <a:p>
             <a:pPr>
+              <a:defRPr sz="2400" b="1">
+                <a:solidFill>
+                  <a:srgbClr val="F8FAFC"/>
+                </a:solidFill>
+              </a:defRPr>
+            </a:pPr>
+            <a:r>
+              <a:t>1. Problem Statement &amp; Limitations of Legacy Underwriting</a:t>
+            </a:r>
+          </a:p>
+        </p:txBody>
+      </p:sp>
+      <p:sp>
+        <p:nvSpPr>
+          <p:cNvPr id="6" name="TextBox 5"/>
+          <p:cNvSpPr txBox="1"/>
+          <p:nvPr/>
+        </p:nvSpPr>
+        <p:spPr>
+          <a:xfrm>
+            <a:off x="548640" y="960120"/>
+            <a:ext cx="11064240" cy="365760"/>
+          </a:xfrm>
+          <a:prstGeom prst="rect">
+            <a:avLst/>
+          </a:prstGeom>
+          <a:noFill/>
+        </p:spPr>
+        <p:txBody>
+          <a:bodyPr wrap="none">
+            <a:spAutoFit/>
+          </a:bodyPr>
+          <a:lstStyle/>
+          <a:p>
+            <a:pPr>
               <a:defRPr sz="1200">
                 <a:solidFill>
                   <a:srgbClr val="94A3B8"/>
@@ -5600,7 +5835,7 @@
       </p:sp>
       <p:sp>
         <p:nvSpPr>
-          <p:cNvPr id="6" name="Rounded Rectangle 5"/>
+          <p:cNvPr id="7" name="Rounded Rectangle 6"/>
           <p:cNvSpPr/>
           <p:nvPr/>
         </p:nvSpPr>
@@ -5645,7 +5880,7 @@
       </p:sp>
       <p:sp>
         <p:nvSpPr>
-          <p:cNvPr id="7" name="TextBox 6"/>
+          <p:cNvPr id="8" name="TextBox 7"/>
           <p:cNvSpPr txBox="1"/>
           <p:nvPr/>
         </p:nvSpPr>
@@ -5743,7 +5978,7 @@
       </p:sp>
       <p:sp>
         <p:nvSpPr>
-          <p:cNvPr id="8" name="Rounded Rectangle 7"/>
+          <p:cNvPr id="9" name="Rounded Rectangle 8"/>
           <p:cNvSpPr/>
           <p:nvPr/>
         </p:nvSpPr>
@@ -5788,7 +6023,7 @@
       </p:sp>
       <p:sp>
         <p:nvSpPr>
-          <p:cNvPr id="9" name="TextBox 8"/>
+          <p:cNvPr id="10" name="TextBox 9"/>
           <p:cNvSpPr txBox="1"/>
           <p:nvPr/>
         </p:nvSpPr>
@@ -5886,7 +6121,7 @@
       </p:sp>
       <p:sp>
         <p:nvSpPr>
-          <p:cNvPr id="10" name="Rounded Rectangle 9"/>
+          <p:cNvPr id="11" name="Rounded Rectangle 10"/>
           <p:cNvSpPr/>
           <p:nvPr/>
         </p:nvSpPr>
@@ -5931,7 +6166,7 @@
       </p:sp>
       <p:sp>
         <p:nvSpPr>
-          <p:cNvPr id="11" name="TextBox 10"/>
+          <p:cNvPr id="12" name="TextBox 11"/>
           <p:cNvSpPr txBox="1"/>
           <p:nvPr/>
         </p:nvSpPr>
@@ -6139,8 +6374,8 @@
         </p:nvSpPr>
         <p:spPr>
           <a:xfrm>
-            <a:off x="548640" y="475488"/>
-            <a:ext cx="11064240" cy="502920"/>
+            <a:off x="6858000" y="201168"/>
+            <a:ext cx="4785055" cy="320040"/>
           </a:xfrm>
           <a:prstGeom prst="rect">
             <a:avLst/>
@@ -6153,15 +6388,15 @@
           </a:bodyPr>
           <a:lstStyle/>
           <a:p>
-            <a:pPr>
-              <a:defRPr sz="2400" b="1">
-                <a:solidFill>
-                  <a:srgbClr val="F8FAFC"/>
-                </a:solidFill>
-              </a:defRPr>
-            </a:pPr>
-            <a:r>
-              <a:t>2. End-to-End Predictive Underwriting System Architecture</a:t>
+            <a:pPr algn="r"/>
+            <a:r>
+              <a:rPr sz="1000" b="1">
+                <a:solidFill>
+                  <a:srgbClr val="38BDF8"/>
+                </a:solidFill>
+                <a:hlinkClick r:id="rId2"/>
+              </a:rPr>
+              <a:t>GitHub: https://github.com/Indra-Official/FIntech</a:t>
             </a:r>
           </a:p>
         </p:txBody>
@@ -6174,8 +6409,8 @@
         </p:nvSpPr>
         <p:spPr>
           <a:xfrm>
-            <a:off x="548640" y="960120"/>
-            <a:ext cx="11064240" cy="365760"/>
+            <a:off x="548640" y="475488"/>
+            <a:ext cx="11064240" cy="502920"/>
           </a:xfrm>
           <a:prstGeom prst="rect">
             <a:avLst/>
@@ -6189,6 +6424,41 @@
           <a:lstStyle/>
           <a:p>
             <a:pPr>
+              <a:defRPr sz="2400" b="1">
+                <a:solidFill>
+                  <a:srgbClr val="F8FAFC"/>
+                </a:solidFill>
+              </a:defRPr>
+            </a:pPr>
+            <a:r>
+              <a:t>2. End-to-End Predictive Underwriting System Architecture</a:t>
+            </a:r>
+          </a:p>
+        </p:txBody>
+      </p:sp>
+      <p:sp>
+        <p:nvSpPr>
+          <p:cNvPr id="6" name="TextBox 5"/>
+          <p:cNvSpPr txBox="1"/>
+          <p:nvPr/>
+        </p:nvSpPr>
+        <p:spPr>
+          <a:xfrm>
+            <a:off x="548640" y="960120"/>
+            <a:ext cx="11064240" cy="365760"/>
+          </a:xfrm>
+          <a:prstGeom prst="rect">
+            <a:avLst/>
+          </a:prstGeom>
+          <a:noFill/>
+        </p:spPr>
+        <p:txBody>
+          <a:bodyPr wrap="none">
+            <a:spAutoFit/>
+          </a:bodyPr>
+          <a:lstStyle/>
+          <a:p>
+            <a:pPr>
               <a:defRPr sz="1200">
                 <a:solidFill>
                   <a:srgbClr val="94A3B8"/>
@@ -6203,7 +6473,7 @@
       </p:sp>
       <p:sp>
         <p:nvSpPr>
-          <p:cNvPr id="6" name="Rounded Rectangle 5"/>
+          <p:cNvPr id="7" name="Rounded Rectangle 6"/>
           <p:cNvSpPr/>
           <p:nvPr/>
         </p:nvSpPr>
@@ -6248,7 +6518,7 @@
       </p:sp>
       <p:sp>
         <p:nvSpPr>
-          <p:cNvPr id="7" name="TextBox 6"/>
+          <p:cNvPr id="8" name="TextBox 7"/>
           <p:cNvSpPr txBox="1"/>
           <p:nvPr/>
         </p:nvSpPr>
@@ -6316,7 +6586,7 @@
       </p:sp>
       <p:sp>
         <p:nvSpPr>
-          <p:cNvPr id="8" name="Rounded Rectangle 7"/>
+          <p:cNvPr id="9" name="Rounded Rectangle 8"/>
           <p:cNvSpPr/>
           <p:nvPr/>
         </p:nvSpPr>
@@ -6361,7 +6631,7 @@
       </p:sp>
       <p:sp>
         <p:nvSpPr>
-          <p:cNvPr id="9" name="TextBox 8"/>
+          <p:cNvPr id="10" name="TextBox 9"/>
           <p:cNvSpPr txBox="1"/>
           <p:nvPr/>
         </p:nvSpPr>
@@ -6459,7 +6729,7 @@
       </p:sp>
       <p:sp>
         <p:nvSpPr>
-          <p:cNvPr id="10" name="Rounded Rectangle 9"/>
+          <p:cNvPr id="11" name="Rounded Rectangle 10"/>
           <p:cNvSpPr/>
           <p:nvPr/>
         </p:nvSpPr>
@@ -6504,7 +6774,7 @@
       </p:sp>
       <p:sp>
         <p:nvSpPr>
-          <p:cNvPr id="11" name="TextBox 10"/>
+          <p:cNvPr id="12" name="TextBox 11"/>
           <p:cNvSpPr txBox="1"/>
           <p:nvPr/>
         </p:nvSpPr>
@@ -6587,7 +6857,7 @@
       </p:sp>
       <p:sp>
         <p:nvSpPr>
-          <p:cNvPr id="12" name="Rounded Rectangle 11"/>
+          <p:cNvPr id="13" name="Rounded Rectangle 12"/>
           <p:cNvSpPr/>
           <p:nvPr/>
         </p:nvSpPr>
@@ -6632,7 +6902,7 @@
       </p:sp>
       <p:sp>
         <p:nvSpPr>
-          <p:cNvPr id="13" name="TextBox 12"/>
+          <p:cNvPr id="14" name="TextBox 13"/>
           <p:cNvSpPr txBox="1"/>
           <p:nvPr/>
         </p:nvSpPr>
@@ -6730,7 +7000,7 @@
       </p:sp>
       <p:sp>
         <p:nvSpPr>
-          <p:cNvPr id="14" name="Rounded Rectangle 13"/>
+          <p:cNvPr id="15" name="Rounded Rectangle 14"/>
           <p:cNvSpPr/>
           <p:nvPr/>
         </p:nvSpPr>
@@ -6775,7 +7045,7 @@
       </p:sp>
       <p:sp>
         <p:nvSpPr>
-          <p:cNvPr id="15" name="TextBox 14"/>
+          <p:cNvPr id="16" name="TextBox 15"/>
           <p:cNvSpPr txBox="1"/>
           <p:nvPr/>
         </p:nvSpPr>
@@ -6968,8 +7238,8 @@
         </p:nvSpPr>
         <p:spPr>
           <a:xfrm>
-            <a:off x="548640" y="475488"/>
-            <a:ext cx="11064240" cy="502920"/>
+            <a:off x="6858000" y="201168"/>
+            <a:ext cx="4785055" cy="320040"/>
           </a:xfrm>
           <a:prstGeom prst="rect">
             <a:avLst/>
@@ -6982,15 +7252,15 @@
           </a:bodyPr>
           <a:lstStyle/>
           <a:p>
-            <a:pPr>
-              <a:defRPr sz="2400" b="1">
-                <a:solidFill>
-                  <a:srgbClr val="F8FAFC"/>
-                </a:solidFill>
-              </a:defRPr>
-            </a:pPr>
-            <a:r>
-              <a:t>3. Calibrated Risk Models &amp; Reliability Analysis (2026 Update)</a:t>
+            <a:pPr algn="r"/>
+            <a:r>
+              <a:rPr sz="1000" b="1">
+                <a:solidFill>
+                  <a:srgbClr val="38BDF8"/>
+                </a:solidFill>
+                <a:hlinkClick r:id="rId2"/>
+              </a:rPr>
+              <a:t>GitHub: https://github.com/Indra-Official/FIntech</a:t>
             </a:r>
           </a:p>
         </p:txBody>
@@ -7003,8 +7273,8 @@
         </p:nvSpPr>
         <p:spPr>
           <a:xfrm>
-            <a:off x="548640" y="960120"/>
-            <a:ext cx="11064240" cy="365760"/>
+            <a:off x="548640" y="475488"/>
+            <a:ext cx="11064240" cy="502920"/>
           </a:xfrm>
           <a:prstGeom prst="rect">
             <a:avLst/>
@@ -7018,6 +7288,41 @@
           <a:lstStyle/>
           <a:p>
             <a:pPr>
+              <a:defRPr sz="2400" b="1">
+                <a:solidFill>
+                  <a:srgbClr val="F8FAFC"/>
+                </a:solidFill>
+              </a:defRPr>
+            </a:pPr>
+            <a:r>
+              <a:t>3. Calibrated Risk Models &amp; Reliability Analysis (2026 Update)</a:t>
+            </a:r>
+          </a:p>
+        </p:txBody>
+      </p:sp>
+      <p:sp>
+        <p:nvSpPr>
+          <p:cNvPr id="6" name="TextBox 5"/>
+          <p:cNvSpPr txBox="1"/>
+          <p:nvPr/>
+        </p:nvSpPr>
+        <p:spPr>
+          <a:xfrm>
+            <a:off x="548640" y="960120"/>
+            <a:ext cx="11064240" cy="365760"/>
+          </a:xfrm>
+          <a:prstGeom prst="rect">
+            <a:avLst/>
+          </a:prstGeom>
+          <a:noFill/>
+        </p:spPr>
+        <p:txBody>
+          <a:bodyPr wrap="none">
+            <a:spAutoFit/>
+          </a:bodyPr>
+          <a:lstStyle/>
+          <a:p>
+            <a:pPr>
               <a:defRPr sz="1200">
                 <a:solidFill>
                   <a:srgbClr val="94A3B8"/>
@@ -7032,14 +7337,14 @@
       </p:sp>
       <p:pic>
         <p:nvPicPr>
-          <p:cNvPr id="6" name="Picture 5" descr="calibration_reliability.png"/>
+          <p:cNvPr id="7" name="Picture 6" descr="calibration_reliability.png"/>
           <p:cNvPicPr>
             <a:picLocks noChangeAspect="1"/>
           </p:cNvPicPr>
           <p:nvPr/>
         </p:nvPicPr>
         <p:blipFill>
-          <a:blip r:embed="rId2"/>
+          <a:blip r:embed="rId3"/>
           <a:stretch>
             <a:fillRect/>
           </a:stretch>
@@ -7056,7 +7361,7 @@
       </p:pic>
       <p:sp>
         <p:nvSpPr>
-          <p:cNvPr id="7" name="Rounded Rectangle 6"/>
+          <p:cNvPr id="8" name="Rounded Rectangle 7"/>
           <p:cNvSpPr/>
           <p:nvPr/>
         </p:nvSpPr>
@@ -7101,7 +7406,7 @@
       </p:sp>
       <p:sp>
         <p:nvSpPr>
-          <p:cNvPr id="8" name="TextBox 7"/>
+          <p:cNvPr id="9" name="TextBox 8"/>
           <p:cNvSpPr txBox="1"/>
           <p:nvPr/>
         </p:nvSpPr>
@@ -7324,8 +7629,8 @@
         </p:nvSpPr>
         <p:spPr>
           <a:xfrm>
-            <a:off x="548640" y="475488"/>
-            <a:ext cx="11064240" cy="502920"/>
+            <a:off x="6858000" y="201168"/>
+            <a:ext cx="4785055" cy="320040"/>
           </a:xfrm>
           <a:prstGeom prst="rect">
             <a:avLst/>
@@ -7338,15 +7643,15 @@
           </a:bodyPr>
           <a:lstStyle/>
           <a:p>
-            <a:pPr>
-              <a:defRPr sz="2400" b="1">
-                <a:solidFill>
-                  <a:srgbClr val="F8FAFC"/>
-                </a:solidFill>
-              </a:defRPr>
-            </a:pPr>
-            <a:r>
-              <a:t>4. Actuarial Pricing Formula &amp; Portfolio Loss Forecasting</a:t>
+            <a:pPr algn="r"/>
+            <a:r>
+              <a:rPr sz="1000" b="1">
+                <a:solidFill>
+                  <a:srgbClr val="38BDF8"/>
+                </a:solidFill>
+                <a:hlinkClick r:id="rId2"/>
+              </a:rPr>
+              <a:t>GitHub: https://github.com/Indra-Official/FIntech</a:t>
             </a:r>
           </a:p>
         </p:txBody>
@@ -7359,8 +7664,8 @@
         </p:nvSpPr>
         <p:spPr>
           <a:xfrm>
-            <a:off x="548640" y="960120"/>
-            <a:ext cx="11064240" cy="365760"/>
+            <a:off x="548640" y="475488"/>
+            <a:ext cx="11064240" cy="502920"/>
           </a:xfrm>
           <a:prstGeom prst="rect">
             <a:avLst/>
@@ -7374,6 +7679,41 @@
           <a:lstStyle/>
           <a:p>
             <a:pPr>
+              <a:defRPr sz="2400" b="1">
+                <a:solidFill>
+                  <a:srgbClr val="F8FAFC"/>
+                </a:solidFill>
+              </a:defRPr>
+            </a:pPr>
+            <a:r>
+              <a:t>4. Actuarial Pricing Formula &amp; Portfolio Loss Forecasting</a:t>
+            </a:r>
+          </a:p>
+        </p:txBody>
+      </p:sp>
+      <p:sp>
+        <p:nvSpPr>
+          <p:cNvPr id="6" name="TextBox 5"/>
+          <p:cNvSpPr txBox="1"/>
+          <p:nvPr/>
+        </p:nvSpPr>
+        <p:spPr>
+          <a:xfrm>
+            <a:off x="548640" y="960120"/>
+            <a:ext cx="11064240" cy="365760"/>
+          </a:xfrm>
+          <a:prstGeom prst="rect">
+            <a:avLst/>
+          </a:prstGeom>
+          <a:noFill/>
+        </p:spPr>
+        <p:txBody>
+          <a:bodyPr wrap="none">
+            <a:spAutoFit/>
+          </a:bodyPr>
+          <a:lstStyle/>
+          <a:p>
+            <a:pPr>
               <a:defRPr sz="1200">
                 <a:solidFill>
                   <a:srgbClr val="94A3B8"/>
@@ -7388,7 +7728,7 @@
       </p:sp>
       <p:sp>
         <p:nvSpPr>
-          <p:cNvPr id="6" name="Rounded Rectangle 5"/>
+          <p:cNvPr id="7" name="Rounded Rectangle 6"/>
           <p:cNvSpPr/>
           <p:nvPr/>
         </p:nvSpPr>
@@ -7433,7 +7773,7 @@
       </p:sp>
       <p:sp>
         <p:nvSpPr>
-          <p:cNvPr id="7" name="TextBox 6"/>
+          <p:cNvPr id="8" name="TextBox 7"/>
           <p:cNvSpPr txBox="1"/>
           <p:nvPr/>
         </p:nvSpPr>
@@ -7546,7 +7886,7 @@
       </p:sp>
       <p:sp>
         <p:nvSpPr>
-          <p:cNvPr id="8" name="Rounded Rectangle 7"/>
+          <p:cNvPr id="9" name="Rounded Rectangle 8"/>
           <p:cNvSpPr/>
           <p:nvPr/>
         </p:nvSpPr>
@@ -7591,7 +7931,7 @@
       </p:sp>
       <p:sp>
         <p:nvSpPr>
-          <p:cNvPr id="9" name="TextBox 8"/>
+          <p:cNvPr id="10" name="TextBox 9"/>
           <p:cNvSpPr txBox="1"/>
           <p:nvPr/>
         </p:nvSpPr>
@@ -7829,8 +8169,8 @@
         </p:nvSpPr>
         <p:spPr>
           <a:xfrm>
-            <a:off x="548640" y="475488"/>
-            <a:ext cx="11064240" cy="502920"/>
+            <a:off x="6858000" y="201168"/>
+            <a:ext cx="4785055" cy="320040"/>
           </a:xfrm>
           <a:prstGeom prst="rect">
             <a:avLst/>
@@ -7843,15 +8183,15 @@
           </a:bodyPr>
           <a:lstStyle/>
           <a:p>
-            <a:pPr>
-              <a:defRPr sz="2400" b="1">
-                <a:solidFill>
-                  <a:srgbClr val="F8FAFC"/>
-                </a:solidFill>
-              </a:defRPr>
-            </a:pPr>
-            <a:r>
-              <a:t>5. Fairness Constraints &amp; Proxy Bias Mitigation (2026 Update)</a:t>
+            <a:pPr algn="r"/>
+            <a:r>
+              <a:rPr sz="1000" b="1">
+                <a:solidFill>
+                  <a:srgbClr val="38BDF8"/>
+                </a:solidFill>
+                <a:hlinkClick r:id="rId2"/>
+              </a:rPr>
+              <a:t>GitHub: https://github.com/Indra-Official/FIntech</a:t>
             </a:r>
           </a:p>
         </p:txBody>
@@ -7864,8 +8204,8 @@
         </p:nvSpPr>
         <p:spPr>
           <a:xfrm>
-            <a:off x="548640" y="960120"/>
-            <a:ext cx="11064240" cy="365760"/>
+            <a:off x="548640" y="475488"/>
+            <a:ext cx="11064240" cy="502920"/>
           </a:xfrm>
           <a:prstGeom prst="rect">
             <a:avLst/>
@@ -7879,6 +8219,41 @@
           <a:lstStyle/>
           <a:p>
             <a:pPr>
+              <a:defRPr sz="2400" b="1">
+                <a:solidFill>
+                  <a:srgbClr val="F8FAFC"/>
+                </a:solidFill>
+              </a:defRPr>
+            </a:pPr>
+            <a:r>
+              <a:t>5. Fairness Constraints &amp; Proxy Bias Mitigation (2026 Update)</a:t>
+            </a:r>
+          </a:p>
+        </p:txBody>
+      </p:sp>
+      <p:sp>
+        <p:nvSpPr>
+          <p:cNvPr id="6" name="TextBox 5"/>
+          <p:cNvSpPr txBox="1"/>
+          <p:nvPr/>
+        </p:nvSpPr>
+        <p:spPr>
+          <a:xfrm>
+            <a:off x="548640" y="960120"/>
+            <a:ext cx="11064240" cy="365760"/>
+          </a:xfrm>
+          <a:prstGeom prst="rect">
+            <a:avLst/>
+          </a:prstGeom>
+          <a:noFill/>
+        </p:spPr>
+        <p:txBody>
+          <a:bodyPr wrap="none">
+            <a:spAutoFit/>
+          </a:bodyPr>
+          <a:lstStyle/>
+          <a:p>
+            <a:pPr>
               <a:defRPr sz="1200">
                 <a:solidFill>
                   <a:srgbClr val="94A3B8"/>
@@ -7893,14 +8268,14 @@
       </p:sp>
       <p:pic>
         <p:nvPicPr>
-          <p:cNvPr id="6" name="Picture 5" descr="fairness_mitigation.png"/>
+          <p:cNvPr id="7" name="Picture 6" descr="fairness_mitigation.png"/>
           <p:cNvPicPr>
             <a:picLocks noChangeAspect="1"/>
           </p:cNvPicPr>
           <p:nvPr/>
         </p:nvPicPr>
         <p:blipFill>
-          <a:blip r:embed="rId2"/>
+          <a:blip r:embed="rId3"/>
           <a:stretch>
             <a:fillRect/>
           </a:stretch>
@@ -7917,7 +8292,7 @@
       </p:pic>
       <p:sp>
         <p:nvSpPr>
-          <p:cNvPr id="7" name="Rounded Rectangle 6"/>
+          <p:cNvPr id="8" name="Rounded Rectangle 7"/>
           <p:cNvSpPr/>
           <p:nvPr/>
         </p:nvSpPr>
@@ -7962,7 +8337,7 @@
       </p:sp>
       <p:sp>
         <p:nvSpPr>
-          <p:cNvPr id="8" name="TextBox 7"/>
+          <p:cNvPr id="9" name="TextBox 8"/>
           <p:cNvSpPr txBox="1"/>
           <p:nvPr/>
         </p:nvSpPr>
@@ -8185,8 +8560,8 @@
         </p:nvSpPr>
         <p:spPr>
           <a:xfrm>
-            <a:off x="548640" y="475488"/>
-            <a:ext cx="11064240" cy="502920"/>
+            <a:off x="6858000" y="201168"/>
+            <a:ext cx="4785055" cy="320040"/>
           </a:xfrm>
           <a:prstGeom prst="rect">
             <a:avLst/>
@@ -8199,15 +8574,15 @@
           </a:bodyPr>
           <a:lstStyle/>
           <a:p>
-            <a:pPr>
-              <a:defRPr sz="2400" b="1">
-                <a:solidFill>
-                  <a:srgbClr val="F8FAFC"/>
-                </a:solidFill>
-              </a:defRPr>
-            </a:pPr>
-            <a:r>
-              <a:t>6. Data Privacy &amp; Differential Privacy Engine (2026 Update)</a:t>
+            <a:pPr algn="r"/>
+            <a:r>
+              <a:rPr sz="1000" b="1">
+                <a:solidFill>
+                  <a:srgbClr val="38BDF8"/>
+                </a:solidFill>
+                <a:hlinkClick r:id="rId2"/>
+              </a:rPr>
+              <a:t>GitHub: https://github.com/Indra-Official/FIntech</a:t>
             </a:r>
           </a:p>
         </p:txBody>
@@ -8220,8 +8595,8 @@
         </p:nvSpPr>
         <p:spPr>
           <a:xfrm>
-            <a:off x="548640" y="960120"/>
-            <a:ext cx="11064240" cy="365760"/>
+            <a:off x="548640" y="475488"/>
+            <a:ext cx="11064240" cy="502920"/>
           </a:xfrm>
           <a:prstGeom prst="rect">
             <a:avLst/>
@@ -8235,6 +8610,41 @@
           <a:lstStyle/>
           <a:p>
             <a:pPr>
+              <a:defRPr sz="2400" b="1">
+                <a:solidFill>
+                  <a:srgbClr val="F8FAFC"/>
+                </a:solidFill>
+              </a:defRPr>
+            </a:pPr>
+            <a:r>
+              <a:t>6. Data Privacy &amp; Differential Privacy Engine (2026 Update)</a:t>
+            </a:r>
+          </a:p>
+        </p:txBody>
+      </p:sp>
+      <p:sp>
+        <p:nvSpPr>
+          <p:cNvPr id="6" name="TextBox 5"/>
+          <p:cNvSpPr txBox="1"/>
+          <p:nvPr/>
+        </p:nvSpPr>
+        <p:spPr>
+          <a:xfrm>
+            <a:off x="548640" y="960120"/>
+            <a:ext cx="11064240" cy="365760"/>
+          </a:xfrm>
+          <a:prstGeom prst="rect">
+            <a:avLst/>
+          </a:prstGeom>
+          <a:noFill/>
+        </p:spPr>
+        <p:txBody>
+          <a:bodyPr wrap="none">
+            <a:spAutoFit/>
+          </a:bodyPr>
+          <a:lstStyle/>
+          <a:p>
+            <a:pPr>
               <a:defRPr sz="1200">
                 <a:solidFill>
                   <a:srgbClr val="94A3B8"/>
@@ -8249,14 +8659,14 @@
       </p:sp>
       <p:pic>
         <p:nvPicPr>
-          <p:cNvPr id="6" name="Picture 5" descr="privacy_utility_tradeoff.png"/>
+          <p:cNvPr id="7" name="Picture 6" descr="privacy_utility_tradeoff.png"/>
           <p:cNvPicPr>
             <a:picLocks noChangeAspect="1"/>
           </p:cNvPicPr>
           <p:nvPr/>
         </p:nvPicPr>
         <p:blipFill>
-          <a:blip r:embed="rId2"/>
+          <a:blip r:embed="rId3"/>
           <a:stretch>
             <a:fillRect/>
           </a:stretch>
@@ -8273,7 +8683,7 @@
       </p:pic>
       <p:sp>
         <p:nvSpPr>
-          <p:cNvPr id="7" name="Rounded Rectangle 6"/>
+          <p:cNvPr id="8" name="Rounded Rectangle 7"/>
           <p:cNvSpPr/>
           <p:nvPr/>
         </p:nvSpPr>
@@ -8318,7 +8728,7 @@
       </p:sp>
       <p:sp>
         <p:nvSpPr>
-          <p:cNvPr id="8" name="TextBox 7"/>
+          <p:cNvPr id="9" name="TextBox 8"/>
           <p:cNvSpPr txBox="1"/>
           <p:nvPr/>
         </p:nvSpPr>
@@ -8526,8 +8936,8 @@
         </p:nvSpPr>
         <p:spPr>
           <a:xfrm>
-            <a:off x="548640" y="475488"/>
-            <a:ext cx="11064240" cy="502920"/>
+            <a:off x="6858000" y="201168"/>
+            <a:ext cx="4785055" cy="320040"/>
           </a:xfrm>
           <a:prstGeom prst="rect">
             <a:avLst/>
@@ -8540,15 +8950,15 @@
           </a:bodyPr>
           <a:lstStyle/>
           <a:p>
-            <a:pPr>
-              <a:defRPr sz="2400" b="1">
-                <a:solidFill>
-                  <a:srgbClr val="F8FAFC"/>
-                </a:solidFill>
-              </a:defRPr>
-            </a:pPr>
-            <a:r>
-              <a:t>7. Continuous Model Monitoring &amp; Drift Detection (2026 Update)</a:t>
+            <a:pPr algn="r"/>
+            <a:r>
+              <a:rPr sz="1000" b="1">
+                <a:solidFill>
+                  <a:srgbClr val="38BDF8"/>
+                </a:solidFill>
+                <a:hlinkClick r:id="rId2"/>
+              </a:rPr>
+              <a:t>GitHub: https://github.com/Indra-Official/FIntech</a:t>
             </a:r>
           </a:p>
         </p:txBody>
@@ -8561,8 +8971,8 @@
         </p:nvSpPr>
         <p:spPr>
           <a:xfrm>
-            <a:off x="548640" y="960120"/>
-            <a:ext cx="11064240" cy="365760"/>
+            <a:off x="548640" y="475488"/>
+            <a:ext cx="11064240" cy="502920"/>
           </a:xfrm>
           <a:prstGeom prst="rect">
             <a:avLst/>
@@ -8576,6 +8986,41 @@
           <a:lstStyle/>
           <a:p>
             <a:pPr>
+              <a:defRPr sz="2400" b="1">
+                <a:solidFill>
+                  <a:srgbClr val="F8FAFC"/>
+                </a:solidFill>
+              </a:defRPr>
+            </a:pPr>
+            <a:r>
+              <a:t>7. Continuous Model Monitoring &amp; Drift Detection (2026 Update)</a:t>
+            </a:r>
+          </a:p>
+        </p:txBody>
+      </p:sp>
+      <p:sp>
+        <p:nvSpPr>
+          <p:cNvPr id="6" name="TextBox 5"/>
+          <p:cNvSpPr txBox="1"/>
+          <p:nvPr/>
+        </p:nvSpPr>
+        <p:spPr>
+          <a:xfrm>
+            <a:off x="548640" y="960120"/>
+            <a:ext cx="11064240" cy="365760"/>
+          </a:xfrm>
+          <a:prstGeom prst="rect">
+            <a:avLst/>
+          </a:prstGeom>
+          <a:noFill/>
+        </p:spPr>
+        <p:txBody>
+          <a:bodyPr wrap="none">
+            <a:spAutoFit/>
+          </a:bodyPr>
+          <a:lstStyle/>
+          <a:p>
+            <a:pPr>
               <a:defRPr sz="1200">
                 <a:solidFill>
                   <a:srgbClr val="94A3B8"/>
@@ -8590,14 +9035,14 @@
       </p:sp>
       <p:pic>
         <p:nvPicPr>
-          <p:cNvPr id="6" name="Picture 5" descr="drift_monitoring_psi.png"/>
+          <p:cNvPr id="7" name="Picture 6" descr="drift_monitoring_psi.png"/>
           <p:cNvPicPr>
             <a:picLocks noChangeAspect="1"/>
           </p:cNvPicPr>
           <p:nvPr/>
         </p:nvPicPr>
         <p:blipFill>
-          <a:blip r:embed="rId2"/>
+          <a:blip r:embed="rId3"/>
           <a:stretch>
             <a:fillRect/>
           </a:stretch>
@@ -8614,7 +9059,7 @@
       </p:pic>
       <p:sp>
         <p:nvSpPr>
-          <p:cNvPr id="7" name="Rounded Rectangle 6"/>
+          <p:cNvPr id="8" name="Rounded Rectangle 7"/>
           <p:cNvSpPr/>
           <p:nvPr/>
         </p:nvSpPr>
@@ -8659,7 +9104,7 @@
       </p:sp>
       <p:sp>
         <p:nvSpPr>
-          <p:cNvPr id="8" name="TextBox 7"/>
+          <p:cNvPr id="9" name="TextBox 8"/>
           <p:cNvSpPr txBox="1"/>
           <p:nvPr/>
         </p:nvSpPr>
@@ -8867,8 +9312,8 @@
         </p:nvSpPr>
         <p:spPr>
           <a:xfrm>
-            <a:off x="548640" y="475488"/>
-            <a:ext cx="11064240" cy="502920"/>
+            <a:off x="6858000" y="201168"/>
+            <a:ext cx="4785055" cy="320040"/>
           </a:xfrm>
           <a:prstGeom prst="rect">
             <a:avLst/>
@@ -8881,15 +9326,15 @@
           </a:bodyPr>
           <a:lstStyle/>
           <a:p>
-            <a:pPr>
-              <a:defRPr sz="2400" b="1">
-                <a:solidFill>
-                  <a:srgbClr val="F8FAFC"/>
-                </a:solidFill>
-              </a:defRPr>
-            </a:pPr>
-            <a:r>
-              <a:t>8. Live Demonstration Walkthrough — Interactive Web Studio</a:t>
+            <a:pPr algn="r"/>
+            <a:r>
+              <a:rPr sz="1000" b="1">
+                <a:solidFill>
+                  <a:srgbClr val="38BDF8"/>
+                </a:solidFill>
+                <a:hlinkClick r:id="rId2"/>
+              </a:rPr>
+              <a:t>GitHub: https://github.com/Indra-Official/FIntech</a:t>
             </a:r>
           </a:p>
         </p:txBody>
@@ -8902,8 +9347,8 @@
         </p:nvSpPr>
         <p:spPr>
           <a:xfrm>
-            <a:off x="548640" y="960120"/>
-            <a:ext cx="11064240" cy="365760"/>
+            <a:off x="548640" y="475488"/>
+            <a:ext cx="11064240" cy="502920"/>
           </a:xfrm>
           <a:prstGeom prst="rect">
             <a:avLst/>
@@ -8917,6 +9362,41 @@
           <a:lstStyle/>
           <a:p>
             <a:pPr>
+              <a:defRPr sz="2400" b="1">
+                <a:solidFill>
+                  <a:srgbClr val="F8FAFC"/>
+                </a:solidFill>
+              </a:defRPr>
+            </a:pPr>
+            <a:r>
+              <a:t>8. Live Demonstration Walkthrough — Interactive Web Studio</a:t>
+            </a:r>
+          </a:p>
+        </p:txBody>
+      </p:sp>
+      <p:sp>
+        <p:nvSpPr>
+          <p:cNvPr id="6" name="TextBox 5"/>
+          <p:cNvSpPr txBox="1"/>
+          <p:nvPr/>
+        </p:nvSpPr>
+        <p:spPr>
+          <a:xfrm>
+            <a:off x="548640" y="960120"/>
+            <a:ext cx="11064240" cy="365760"/>
+          </a:xfrm>
+          <a:prstGeom prst="rect">
+            <a:avLst/>
+          </a:prstGeom>
+          <a:noFill/>
+        </p:spPr>
+        <p:txBody>
+          <a:bodyPr wrap="none">
+            <a:spAutoFit/>
+          </a:bodyPr>
+          <a:lstStyle/>
+          <a:p>
+            <a:pPr>
               <a:defRPr sz="1200">
                 <a:solidFill>
                   <a:srgbClr val="94A3B8"/>
@@ -8931,14 +9411,14 @@
       </p:sp>
       <p:pic>
         <p:nvPicPr>
-          <p:cNvPr id="6" name="Picture 5" descr="loss_forecasting_pricing.png"/>
+          <p:cNvPr id="7" name="Picture 6" descr="loss_forecasting_pricing.png"/>
           <p:cNvPicPr>
             <a:picLocks noChangeAspect="1"/>
           </p:cNvPicPr>
           <p:nvPr/>
         </p:nvPicPr>
         <p:blipFill>
-          <a:blip r:embed="rId2"/>
+          <a:blip r:embed="rId3"/>
           <a:stretch>
             <a:fillRect/>
           </a:stretch>
@@ -8955,7 +9435,7 @@
       </p:pic>
       <p:sp>
         <p:nvSpPr>
-          <p:cNvPr id="7" name="Rounded Rectangle 6"/>
+          <p:cNvPr id="8" name="Rounded Rectangle 7"/>
           <p:cNvSpPr/>
           <p:nvPr/>
         </p:nvSpPr>
@@ -9000,7 +9480,7 @@
       </p:sp>
       <p:sp>
         <p:nvSpPr>
-          <p:cNvPr id="8" name="TextBox 7"/>
+          <p:cNvPr id="9" name="TextBox 8"/>
           <p:cNvSpPr txBox="1"/>
           <p:nvPr/>
         </p:nvSpPr>
